--- a/classes/parte-2-deep-learning/165-rl-moderno-a3c-ppo-sac-vista-general/clase-165-rl-moderno-a3c-ppo-sac-vista-general-presentacion.pptx
+++ b/classes/parte-2-deep-learning/165-rl-moderno-a3c-ppo-sac-vista-general/clase-165-rl-moderno-a3c-ppo-sac-vista-general-presentacion.pptx
@@ -4823,7 +4823,7 @@
                 </a:solidFill>
                 <a:latin typeface="Segoe UI"/>
               </a:rPr>
-              <a:t>Primer bloque ejecutable del notebook.</a:t>
+              <a:t>- Actor π_θ(a|s): elige acciones. - Critic V_φ(s): estima el valor del estado. - Advantage A(s,a) = G − V(s): cuánto mejor fue la acción que el promedio.</a:t>
             </a:r>
           </a:p>
         </p:txBody>
@@ -4910,7 +4910,140 @@
                 </a:solidFill>
                 <a:latin typeface="Courier New"/>
               </a:rPr>
-              <a:t># Imports y configuración inicial</a:t>
+              <a:t>import numpy as np</a:t>
+            </a:r>
+          </a:p>
+          <a:p>
+            <a:pPr>
+              <a:defRPr sz="1200" b="0">
+                <a:solidFill>
+                  <a:srgbClr val="F8FAFC"/>
+                </a:solidFill>
+                <a:latin typeface="Courier New"/>
+              </a:defRPr>
+            </a:pPr>
+            <a:r>
+              <a:rPr sz="1200" b="0">
+                <a:solidFill>
+                  <a:srgbClr val="F8FAFC"/>
+                </a:solidFill>
+                <a:latin typeface="Courier New"/>
+              </a:rPr>
+              <a:t>np.random.seed(42)</a:t>
+            </a:r>
+          </a:p>
+          <a:p>
+            <a:pPr>
+              <a:defRPr sz="1200" b="0">
+                <a:solidFill>
+                  <a:srgbClr val="F8FAFC"/>
+                </a:solidFill>
+                <a:latin typeface="Courier New"/>
+              </a:defRPr>
+            </a:pPr>
+            <a:r>
+              <a:rPr sz="1200" b="0">
+                <a:solidFill>
+                  <a:srgbClr val="F8FAFC"/>
+                </a:solidFill>
+                <a:latin typeface="Courier New"/>
+              </a:rPr>
+              <a:t> </a:t>
+            </a:r>
+          </a:p>
+          <a:p>
+            <a:pPr>
+              <a:defRPr sz="1200" b="0">
+                <a:solidFill>
+                  <a:srgbClr val="F8FAFC"/>
+                </a:solidFill>
+                <a:latin typeface="Courier New"/>
+              </a:defRPr>
+            </a:pPr>
+            <a:r>
+              <a:rPr sz="1200" b="0">
+                <a:solidFill>
+                  <a:srgbClr val="F8FAFC"/>
+                </a:solidFill>
+                <a:latin typeface="Courier New"/>
+              </a:rPr>
+              <a:t># Ejemplo de "critic" como funcion de valor estimada (aqui, un baseline aprendido simulado)</a:t>
+            </a:r>
+          </a:p>
+          <a:p>
+            <a:pPr>
+              <a:defRPr sz="1200" b="0">
+                <a:solidFill>
+                  <a:srgbClr val="F8FAFC"/>
+                </a:solidFill>
+                <a:latin typeface="Courier New"/>
+              </a:defRPr>
+            </a:pPr>
+            <a:r>
+              <a:rPr sz="1200" b="0">
+                <a:solidFill>
+                  <a:srgbClr val="F8FAFC"/>
+                </a:solidFill>
+                <a:latin typeface="Courier New"/>
+              </a:rPr>
+              <a:t>rewards = np.array([1, 1, 1, 1, 10, 0, 0], dtype=float)</a:t>
+            </a:r>
+          </a:p>
+          <a:p>
+            <a:pPr>
+              <a:defRPr sz="1200" b="0">
+                <a:solidFill>
+                  <a:srgbClr val="F8FAFC"/>
+                </a:solidFill>
+                <a:latin typeface="Courier New"/>
+              </a:defRPr>
+            </a:pPr>
+            <a:r>
+              <a:rPr sz="1200" b="0">
+                <a:solidFill>
+                  <a:srgbClr val="F8FAFC"/>
+                </a:solidFill>
+                <a:latin typeface="Courier New"/>
+              </a:rPr>
+              <a:t>values  = np.array([2, 3, 4, 6, 8, 1, 0, 0], dtype=float)   # V(s_0..s_T), largo T+1 (bootstrap)</a:t>
+            </a:r>
+          </a:p>
+          <a:p>
+            <a:pPr>
+              <a:defRPr sz="1200" b="0">
+                <a:solidFill>
+                  <a:srgbClr val="F8FAFC"/>
+                </a:solidFill>
+                <a:latin typeface="Courier New"/>
+              </a:defRPr>
+            </a:pPr>
+            <a:r>
+              <a:rPr sz="1200" b="0">
+                <a:solidFill>
+                  <a:srgbClr val="F8FAFC"/>
+                </a:solidFill>
+                <a:latin typeface="Courier New"/>
+              </a:rPr>
+              <a:t>print("rewards:", rewards)</a:t>
+            </a:r>
+          </a:p>
+          <a:p>
+            <a:pPr>
+              <a:defRPr sz="1200" b="0">
+                <a:solidFill>
+                  <a:srgbClr val="F8FAFC"/>
+                </a:solidFill>
+                <a:latin typeface="Courier New"/>
+              </a:defRPr>
+            </a:pPr>
+            <a:r>
+              <a:rPr sz="1200" b="0">
+                <a:solidFill>
+                  <a:srgbClr val="F8FAFC"/>
+                </a:solidFill>
+                <a:latin typeface="Courier New"/>
+              </a:rPr>
+              <a:t>print("values :", values)</a:t>
             </a:r>
           </a:p>
         </p:txBody>

--- a/classes/parte-2-deep-learning/165-rl-moderno-a3c-ppo-sac-vista-general/clase-165-rl-moderno-a3c-ppo-sac-vista-general-presentacion.pptx
+++ b/classes/parte-2-deep-learning/165-rl-moderno-a3c-ppo-sac-vista-general/clase-165-rl-moderno-a3c-ppo-sac-vista-general-presentacion.pptx
@@ -3272,7 +3272,7 @@
                 </a:solidFill>
                 <a:latin typeface="Segoe UI"/>
               </a:rPr>
-              <a:t>Parte: 2 — Deep Learning · Fuente: papers A3C (Mnih 2016), PPO (Schulman 2017), SAC (Haarnoja 2018) + docs Stable-Baselines3.  Duración estimada: 65 min.</a:t>
+              <a:t>Parte: 2 — Deep Learning · Fuente: papers A3C (Mnih 2016), PPO (Schulman 2017), SAC (Haarnoja 2018) + docs Stable-Baselines3.  Duración estimada: 65 min. · Nivel: Avanzado</a:t>
             </a:r>
           </a:p>
         </p:txBody>
@@ -3581,7 +3581,7 @@
                 </a:solidFill>
                 <a:latin typeface="Segoe UI"/>
               </a:rPr>
-              <a:t>Parte: 2 — Deep Learning · Fuente: papers A3C (Mnih 2016), PPO (Schulman 2017), SAC (Haarnoja 2018) + docs Stable-Baselines3.  Duración estimada: 65 min.</a:t>
+              <a:t>Parte: 2 — Deep Learning · Fuente: papers A3C (Mnih 2016), PPO (Schulman 2017), SAC (Haarnoja 2018) + docs Stable-Baselines3.  Duración estimada: 65 min. · Nivel: Avanzado</a:t>
             </a:r>
           </a:p>
         </p:txBody>
